--- a/DEV-1-16/for_students/DAY-1/ppt/dev1_02.pptx
+++ b/DEV-1-16/for_students/DAY-1/ppt/dev1_02.pptx
@@ -274,7 +274,7 @@
           <a:p>
             <a:fld id="{EF790F8C-5FB9-4EFE-BCC7-F735A3026FD8}" type="datetimeFigureOut">
               <a:rPr lang="ru-RU" smtClean="0"/>
-              <a:t>19.09.2024</a:t>
+              <a:t>04.12.2025</a:t>
             </a:fld>
             <a:endParaRPr lang="ru-RU"/>
           </a:p>
@@ -472,7 +472,7 @@
           <a:p>
             <a:fld id="{EF790F8C-5FB9-4EFE-BCC7-F735A3026FD8}" type="datetimeFigureOut">
               <a:rPr lang="ru-RU" smtClean="0"/>
-              <a:t>19.09.2024</a:t>
+              <a:t>04.12.2025</a:t>
             </a:fld>
             <a:endParaRPr lang="ru-RU"/>
           </a:p>
@@ -680,7 +680,7 @@
           <a:p>
             <a:fld id="{EF790F8C-5FB9-4EFE-BCC7-F735A3026FD8}" type="datetimeFigureOut">
               <a:rPr lang="ru-RU" smtClean="0"/>
-              <a:t>19.09.2024</a:t>
+              <a:t>04.12.2025</a:t>
             </a:fld>
             <a:endParaRPr lang="ru-RU"/>
           </a:p>
@@ -1692,7 +1692,7 @@
           <a:p>
             <a:fld id="{EF790F8C-5FB9-4EFE-BCC7-F735A3026FD8}" type="datetimeFigureOut">
               <a:rPr lang="ru-RU" smtClean="0"/>
-              <a:t>19.09.2024</a:t>
+              <a:t>04.12.2025</a:t>
             </a:fld>
             <a:endParaRPr lang="ru-RU"/>
           </a:p>
@@ -2803,7 +2803,7 @@
           <a:p>
             <a:fld id="{EF790F8C-5FB9-4EFE-BCC7-F735A3026FD8}" type="datetimeFigureOut">
               <a:rPr lang="ru-RU" smtClean="0"/>
-              <a:t>19.09.2024</a:t>
+              <a:t>04.12.2025</a:t>
             </a:fld>
             <a:endParaRPr lang="ru-RU"/>
           </a:p>
@@ -3078,7 +3078,7 @@
           <a:p>
             <a:fld id="{EF790F8C-5FB9-4EFE-BCC7-F735A3026FD8}" type="datetimeFigureOut">
               <a:rPr lang="ru-RU" smtClean="0"/>
-              <a:t>19.09.2024</a:t>
+              <a:t>04.12.2025</a:t>
             </a:fld>
             <a:endParaRPr lang="ru-RU"/>
           </a:p>
@@ -3343,7 +3343,7 @@
           <a:p>
             <a:fld id="{EF790F8C-5FB9-4EFE-BCC7-F735A3026FD8}" type="datetimeFigureOut">
               <a:rPr lang="ru-RU" smtClean="0"/>
-              <a:t>19.09.2024</a:t>
+              <a:t>04.12.2025</a:t>
             </a:fld>
             <a:endParaRPr lang="ru-RU"/>
           </a:p>
@@ -3755,7 +3755,7 @@
           <a:p>
             <a:fld id="{EF790F8C-5FB9-4EFE-BCC7-F735A3026FD8}" type="datetimeFigureOut">
               <a:rPr lang="ru-RU" smtClean="0"/>
-              <a:t>19.09.2024</a:t>
+              <a:t>04.12.2025</a:t>
             </a:fld>
             <a:endParaRPr lang="ru-RU"/>
           </a:p>
@@ -3896,7 +3896,7 @@
           <a:p>
             <a:fld id="{EF790F8C-5FB9-4EFE-BCC7-F735A3026FD8}" type="datetimeFigureOut">
               <a:rPr lang="ru-RU" smtClean="0"/>
-              <a:t>19.09.2024</a:t>
+              <a:t>04.12.2025</a:t>
             </a:fld>
             <a:endParaRPr lang="ru-RU"/>
           </a:p>
@@ -4009,7 +4009,7 @@
           <a:p>
             <a:fld id="{EF790F8C-5FB9-4EFE-BCC7-F735A3026FD8}" type="datetimeFigureOut">
               <a:rPr lang="ru-RU" smtClean="0"/>
-              <a:t>19.09.2024</a:t>
+              <a:t>04.12.2025</a:t>
             </a:fld>
             <a:endParaRPr lang="ru-RU"/>
           </a:p>
@@ -4320,7 +4320,7 @@
           <a:p>
             <a:fld id="{EF790F8C-5FB9-4EFE-BCC7-F735A3026FD8}" type="datetimeFigureOut">
               <a:rPr lang="ru-RU" smtClean="0"/>
-              <a:t>19.09.2024</a:t>
+              <a:t>04.12.2025</a:t>
             </a:fld>
             <a:endParaRPr lang="ru-RU"/>
           </a:p>
@@ -4608,7 +4608,7 @@
           <a:p>
             <a:fld id="{EF790F8C-5FB9-4EFE-BCC7-F735A3026FD8}" type="datetimeFigureOut">
               <a:rPr lang="ru-RU" smtClean="0"/>
-              <a:t>19.09.2024</a:t>
+              <a:t>04.12.2025</a:t>
             </a:fld>
             <a:endParaRPr lang="ru-RU"/>
           </a:p>
@@ -4849,7 +4849,7 @@
           <a:p>
             <a:fld id="{EF790F8C-5FB9-4EFE-BCC7-F735A3026FD8}" type="datetimeFigureOut">
               <a:rPr lang="ru-RU" smtClean="0"/>
-              <a:t>19.09.2024</a:t>
+              <a:t>04.12.2025</a:t>
             </a:fld>
             <a:endParaRPr lang="ru-RU"/>
           </a:p>
@@ -6011,7 +6011,7 @@
 </file>
 
 <file path=ppt/slides/slide1.xml><?xml version="1.0" encoding="utf-8"?>
-<p:sld xmlns:a="http://schemas.openxmlformats.org/drawingml/2006/main" xmlns:r="http://schemas.openxmlformats.org/officeDocument/2006/relationships" xmlns:p="http://schemas.openxmlformats.org/presentationml/2006/main">
+<p:sld xmlns:a="http://schemas.openxmlformats.org/drawingml/2006/main" xmlns:r="http://schemas.openxmlformats.org/officeDocument/2006/relationships" xmlns:p="http://schemas.openxmlformats.org/presentationml/2006/main" showMasterSp="0">
   <p:cSld>
     <p:spTree>
       <p:nvGrpSpPr>
